--- a/content/docs/theory-analysis/spark-rdd/images/images.pptx
+++ b/content/docs/theory-analysis/spark-rdd/images/images.pptx
@@ -216,7 +216,7 @@
           <a:p>
             <a:fld id="{6CD5550B-26C4-49A9-A5BA-636EF7BE6CE9}" type="datetimeFigureOut">
               <a:rPr lang="ko-KR" altLang="en-US" smtClean="0"/>
-              <a:t>2023. 8. 27.</a:t>
+              <a:t>2026. 5. 17.</a:t>
             </a:fld>
             <a:endParaRPr lang="ko-KR" altLang="en-US"/>
           </a:p>
@@ -662,7 +662,7 @@
           <a:p>
             <a:fld id="{FB30EDBD-1C2D-4C1E-B459-B60219FAB484}" type="datetimeFigureOut">
               <a:rPr lang="ko-KR" altLang="en-US" smtClean="0"/>
-              <a:t>2023. 8. 27.</a:t>
+              <a:t>2026. 5. 17.</a:t>
             </a:fld>
             <a:endParaRPr lang="ko-KR" altLang="en-US"/>
           </a:p>
@@ -825,7 +825,7 @@
           <a:p>
             <a:fld id="{FB30EDBD-1C2D-4C1E-B459-B60219FAB484}" type="datetimeFigureOut">
               <a:rPr lang="ko-KR" altLang="en-US" smtClean="0"/>
-              <a:t>2023. 8. 27.</a:t>
+              <a:t>2026. 5. 17.</a:t>
             </a:fld>
             <a:endParaRPr lang="ko-KR" altLang="en-US"/>
           </a:p>
@@ -998,7 +998,7 @@
           <a:p>
             <a:fld id="{FB30EDBD-1C2D-4C1E-B459-B60219FAB484}" type="datetimeFigureOut">
               <a:rPr lang="ko-KR" altLang="en-US" smtClean="0"/>
-              <a:t>2023. 8. 27.</a:t>
+              <a:t>2026. 5. 17.</a:t>
             </a:fld>
             <a:endParaRPr lang="ko-KR" altLang="en-US"/>
           </a:p>
@@ -1161,7 +1161,7 @@
           <a:p>
             <a:fld id="{FB30EDBD-1C2D-4C1E-B459-B60219FAB484}" type="datetimeFigureOut">
               <a:rPr lang="ko-KR" altLang="en-US" smtClean="0"/>
-              <a:t>2023. 8. 27.</a:t>
+              <a:t>2026. 5. 17.</a:t>
             </a:fld>
             <a:endParaRPr lang="ko-KR" altLang="en-US"/>
           </a:p>
@@ -1401,7 +1401,7 @@
           <a:p>
             <a:fld id="{FB30EDBD-1C2D-4C1E-B459-B60219FAB484}" type="datetimeFigureOut">
               <a:rPr lang="ko-KR" altLang="en-US" smtClean="0"/>
-              <a:t>2023. 8. 27.</a:t>
+              <a:t>2026. 5. 17.</a:t>
             </a:fld>
             <a:endParaRPr lang="ko-KR" altLang="en-US"/>
           </a:p>
@@ -1681,7 +1681,7 @@
           <a:p>
             <a:fld id="{FB30EDBD-1C2D-4C1E-B459-B60219FAB484}" type="datetimeFigureOut">
               <a:rPr lang="ko-KR" altLang="en-US" smtClean="0"/>
-              <a:t>2023. 8. 27.</a:t>
+              <a:t>2026. 5. 17.</a:t>
             </a:fld>
             <a:endParaRPr lang="ko-KR" altLang="en-US"/>
           </a:p>
@@ -2095,7 +2095,7 @@
           <a:p>
             <a:fld id="{FB30EDBD-1C2D-4C1E-B459-B60219FAB484}" type="datetimeFigureOut">
               <a:rPr lang="ko-KR" altLang="en-US" smtClean="0"/>
-              <a:t>2023. 8. 27.</a:t>
+              <a:t>2026. 5. 17.</a:t>
             </a:fld>
             <a:endParaRPr lang="ko-KR" altLang="en-US"/>
           </a:p>
@@ -2207,7 +2207,7 @@
           <a:p>
             <a:fld id="{FB30EDBD-1C2D-4C1E-B459-B60219FAB484}" type="datetimeFigureOut">
               <a:rPr lang="ko-KR" altLang="en-US" smtClean="0"/>
-              <a:t>2023. 8. 27.</a:t>
+              <a:t>2026. 5. 17.</a:t>
             </a:fld>
             <a:endParaRPr lang="ko-KR" altLang="en-US"/>
           </a:p>
@@ -2297,7 +2297,7 @@
           <a:p>
             <a:fld id="{FB30EDBD-1C2D-4C1E-B459-B60219FAB484}" type="datetimeFigureOut">
               <a:rPr lang="ko-KR" altLang="en-US" smtClean="0"/>
-              <a:t>2023. 8. 27.</a:t>
+              <a:t>2026. 5. 17.</a:t>
             </a:fld>
             <a:endParaRPr lang="ko-KR" altLang="en-US"/>
           </a:p>
@@ -2567,7 +2567,7 @@
           <a:p>
             <a:fld id="{FB30EDBD-1C2D-4C1E-B459-B60219FAB484}" type="datetimeFigureOut">
               <a:rPr lang="ko-KR" altLang="en-US" smtClean="0"/>
-              <a:t>2023. 8. 27.</a:t>
+              <a:t>2026. 5. 17.</a:t>
             </a:fld>
             <a:endParaRPr lang="ko-KR" altLang="en-US"/>
           </a:p>
@@ -2814,7 +2814,7 @@
           <a:p>
             <a:fld id="{FB30EDBD-1C2D-4C1E-B459-B60219FAB484}" type="datetimeFigureOut">
               <a:rPr lang="ko-KR" altLang="en-US" smtClean="0"/>
-              <a:t>2023. 8. 27.</a:t>
+              <a:t>2026. 5. 17.</a:t>
             </a:fld>
             <a:endParaRPr lang="ko-KR" altLang="en-US"/>
           </a:p>
@@ -3020,7 +3020,7 @@
           <a:p>
             <a:fld id="{FB30EDBD-1C2D-4C1E-B459-B60219FAB484}" type="datetimeFigureOut">
               <a:rPr lang="ko-KR" altLang="en-US" smtClean="0"/>
-              <a:t>2023. 8. 27.</a:t>
+              <a:t>2026. 5. 17.</a:t>
             </a:fld>
             <a:endParaRPr lang="ko-KR" altLang="en-US"/>
           </a:p>
@@ -5108,6 +5108,9 @@
           </a:prstGeom>
           <a:noFill/>
           <a:ln w="12700">
+            <a:solidFill>
+              <a:schemeClr val="tx1"/>
+            </a:solidFill>
             <a:prstDash val="dash"/>
           </a:ln>
         </p:spPr>
